--- a/materials/Day1.pptx
+++ b/materials/Day1.pptx
@@ -17,7 +17,7 @@
     <p:sldId id="396" r:id="rId8"/>
     <p:sldId id="443" r:id="rId9"/>
     <p:sldId id="452" r:id="rId10"/>
-    <p:sldId id="454" r:id="rId11"/>
+    <p:sldId id="455" r:id="rId11"/>
     <p:sldId id="401" r:id="rId12"/>
     <p:sldId id="407" r:id="rId13"/>
     <p:sldId id="385" r:id="rId14"/>
@@ -3053,7 +3053,7 @@
                 <a:ea typeface="Bookman Old Style" pitchFamily="34" charset="-122"/>
                 <a:cs typeface="Bookman Old Style" pitchFamily="34" charset="-120"/>
               </a:rPr>
-              <a:t>The Same 36%, Shown as 1,000 People</a:t>
+              <a:t>The Same 36%: Risk Falls From 3.0% to Just 1.9%</a:t>
             </a:r>
             <a:endParaRPr lang="en-US" sz="2900" dirty="0"/>
           </a:p>
@@ -3092,7 +3092,7 @@
                 <a:ea typeface="Calibri" pitchFamily="34" charset="-122"/>
                 <a:cs typeface="Calibri" pitchFamily="34" charset="-120"/>
               </a:rPr>
-              <a:t>Heart attacks per 1,000 similar patients over about three years, without Lipitor and with it</a:t>
+              <a:t>That 36% cut = 11 fewer heart attacks per 1,000 over ~3 years; 989 in 1,000 see no difference</a:t>
             </a:r>
             <a:endParaRPr lang="en-US" sz="1500" dirty="0"/>
           </a:p>
@@ -57362,7 +57362,7 @@
                 <a:ea typeface="Calibri" pitchFamily="34" charset="-122"/>
                 <a:cs typeface="Calibri" pitchFamily="34" charset="-120"/>
               </a:rPr>
-              <a:t>the relative cut — the headline</a:t>
+              <a:t>the headline number — sounds dramatic</a:t>
             </a:r>
             <a:endParaRPr lang="en-US" sz="1400" dirty="0"/>
           </a:p>
@@ -57437,7 +57437,7 @@
                 <a:ea typeface="Bookman Old Style" pitchFamily="34" charset="-122"/>
                 <a:cs typeface="Bookman Old Style" pitchFamily="34" charset="-120"/>
               </a:rPr>
-              <a:t>11% Absolute</a:t>
+              <a:t>3.0% → 1.9% Absolute</a:t>
             </a:r>
             <a:endParaRPr lang="en-US" sz="2000" dirty="0"/>
           </a:p>
@@ -57476,7 +57476,7 @@
                 <a:ea typeface="Calibri" pitchFamily="34" charset="-122"/>
                 <a:cs typeface="Calibri" pitchFamily="34" charset="-120"/>
               </a:rPr>
-              <a:t>the absolute benefit · NNT 91</a:t>
+              <a:t>a 1.1-point drop · treat 91 to help 1 (NNT 91)</a:t>
             </a:r>
             <a:endParaRPr lang="en-US" sz="1400" dirty="0"/>
           </a:p>
@@ -57524,7 +57524,7 @@
     </p:spTree>
     <p:extLst>
       <p:ext uri="{BB962C8B-B14F-4D97-AF65-F5344CB8AC3E}">
-        <p14:creationId xmlns:p14="http://schemas.microsoft.com/office/powerpoint/2010/main" val="384182883"/>
+        <p14:creationId xmlns:p14="http://schemas.microsoft.com/office/powerpoint/2010/main" val="2827881754"/>
       </p:ext>
     </p:extLst>
   </p:cSld>
